--- a/module-7/Pager Rotation Duties.pptx
+++ b/module-7/Pager Rotation Duties.pptx
@@ -5,10 +5,10 @@
     <p:sldMasterId id="2147483648" r:id="rId4"/>
   </p:sldMasterIdLst>
   <p:notesMasterIdLst>
-    <p:notesMasterId r:id="rId18"/>
+    <p:notesMasterId r:id="rId17"/>
   </p:notesMasterIdLst>
   <p:handoutMasterIdLst>
-    <p:handoutMasterId r:id="rId19"/>
+    <p:handoutMasterId r:id="rId18"/>
   </p:handoutMasterIdLst>
   <p:sldIdLst>
     <p:sldId id="324" r:id="rId5"/>
@@ -20,10 +20,9 @@
     <p:sldId id="328" r:id="rId11"/>
     <p:sldId id="329" r:id="rId12"/>
     <p:sldId id="330" r:id="rId13"/>
-    <p:sldId id="331" r:id="rId14"/>
-    <p:sldId id="334" r:id="rId15"/>
-    <p:sldId id="333" r:id="rId16"/>
-    <p:sldId id="332" r:id="rId17"/>
+    <p:sldId id="334" r:id="rId14"/>
+    <p:sldId id="333" r:id="rId15"/>
+    <p:sldId id="332" r:id="rId16"/>
   </p:sldIdLst>
   <p:sldSz cx="12192000" cy="6858000"/>
   <p:notesSz cx="6858000" cy="9144000"/>
@@ -8680,7 +8679,7 @@
         <p:cNvPr id="1" name="">
           <a:extLst>
             <a:ext uri="{FF2B5EF4-FFF2-40B4-BE49-F238E27FC236}">
-              <a16:creationId xmlns:a16="http://schemas.microsoft.com/office/drawing/2014/main" id="{CC3F711E-BD57-8800-75C3-D88D83B04699}"/>
+              <a16:creationId xmlns:a16="http://schemas.microsoft.com/office/drawing/2014/main" id="{6EF013E1-EF7E-5BB6-04DF-ED5C4F3C23E4}"/>
             </a:ext>
           </a:extLst>
         </p:cNvPr>
@@ -8700,7 +8699,7 @@
           <p:cNvPr id="40" name="Title 39">
             <a:extLst>
               <a:ext uri="{FF2B5EF4-FFF2-40B4-BE49-F238E27FC236}">
-                <a16:creationId xmlns:a16="http://schemas.microsoft.com/office/drawing/2014/main" id="{C9BF41DB-ABAB-1111-061A-37F38A43711C}"/>
+                <a16:creationId xmlns:a16="http://schemas.microsoft.com/office/drawing/2014/main" id="{90A4F5DC-8583-CECB-9FAE-14C60A2871A8}"/>
               </a:ext>
             </a:extLst>
           </p:cNvPr>
@@ -8723,7 +8722,7 @@
           <a:p>
             <a:r>
               <a:rPr lang="en-US" dirty="0"/>
-              <a:t>Best Practice #6 – Compensation &amp; Incentives</a:t>
+              <a:t>Tools Commonly Used for Pager Rotation</a:t>
             </a:r>
             <a:br>
               <a:rPr lang="en-US" dirty="0"/>
@@ -8737,7 +8736,7 @@
           <p:cNvPr id="42" name="Picture Placeholder 3" descr="close up of building">
             <a:extLst>
               <a:ext uri="{FF2B5EF4-FFF2-40B4-BE49-F238E27FC236}">
-                <a16:creationId xmlns:a16="http://schemas.microsoft.com/office/drawing/2014/main" id="{B0C94F41-19BF-1AFA-AF09-22A15DA84EAD}"/>
+                <a16:creationId xmlns:a16="http://schemas.microsoft.com/office/drawing/2014/main" id="{DAE03B87-032A-525F-149F-7D6A834B947A}"/>
               </a:ext>
             </a:extLst>
           </p:cNvPr>
@@ -8886,274 +8885,6 @@
           <p:cNvPr id="5" name="Text Placeholder 4">
             <a:extLst>
               <a:ext uri="{FF2B5EF4-FFF2-40B4-BE49-F238E27FC236}">
-                <a16:creationId xmlns:a16="http://schemas.microsoft.com/office/drawing/2014/main" id="{C7CBADC1-0A1C-9524-1D2C-3A0FAD151E49}"/>
-              </a:ext>
-            </a:extLst>
-          </p:cNvPr>
-          <p:cNvSpPr>
-            <a:spLocks noGrp="1"/>
-          </p:cNvSpPr>
-          <p:nvPr>
-            <p:ph type="body" sz="quarter" idx="13"/>
-          </p:nvPr>
-        </p:nvSpPr>
-        <p:spPr>
-          <a:xfrm>
-            <a:off x="660400" y="2350317"/>
-            <a:ext cx="9125045" cy="2935288"/>
-          </a:xfrm>
-        </p:spPr>
-        <p:txBody>
-          <a:bodyPr/>
-          <a:lstStyle/>
-          <a:p>
-            <a:r>
-              <a:rPr lang="en-US" sz="2800" dirty="0"/>
-              <a:t>Implementing best practices improves reliability and team satisfaction.</a:t>
-            </a:r>
-          </a:p>
-          <a:p>
-            <a:r>
-              <a:rPr lang="en-US" sz="2800" dirty="0"/>
-              <a:t>Adopt fair scheduling, automate alerts, train responders, and continuously refine the process.</a:t>
-            </a:r>
-          </a:p>
-          <a:p>
-            <a:r>
-              <a:rPr lang="en-US" sz="2800" dirty="0"/>
-              <a:t>Ensure your team follows structured on-call management for operational success.</a:t>
-            </a:r>
-            <a:endParaRPr lang="en-US" sz="3200" dirty="0"/>
-          </a:p>
-        </p:txBody>
-      </p:sp>
-    </p:spTree>
-    <p:extLst>
-      <p:ext uri="{BB962C8B-B14F-4D97-AF65-F5344CB8AC3E}">
-        <p14:creationId xmlns:p14="http://schemas.microsoft.com/office/powerpoint/2010/main" val="3290633368"/>
-      </p:ext>
-    </p:extLst>
-  </p:cSld>
-  <p:clrMapOvr>
-    <a:masterClrMapping/>
-  </p:clrMapOvr>
-</p:sld>
-</file>
-
-<file path=ppt/slides/slide11.xml><?xml version="1.0" encoding="utf-8"?>
-<p:sld xmlns:a="http://schemas.openxmlformats.org/drawingml/2006/main" xmlns:r="http://schemas.openxmlformats.org/officeDocument/2006/relationships" xmlns:p="http://schemas.openxmlformats.org/presentationml/2006/main">
-  <p:cSld>
-    <p:spTree>
-      <p:nvGrpSpPr>
-        <p:cNvPr id="1" name="">
-          <a:extLst>
-            <a:ext uri="{FF2B5EF4-FFF2-40B4-BE49-F238E27FC236}">
-              <a16:creationId xmlns:a16="http://schemas.microsoft.com/office/drawing/2014/main" id="{6EF013E1-EF7E-5BB6-04DF-ED5C4F3C23E4}"/>
-            </a:ext>
-          </a:extLst>
-        </p:cNvPr>
-        <p:cNvGrpSpPr/>
-        <p:nvPr/>
-      </p:nvGrpSpPr>
-      <p:grpSpPr>
-        <a:xfrm>
-          <a:off x="0" y="0"/>
-          <a:ext cx="0" cy="0"/>
-          <a:chOff x="0" y="0"/>
-          <a:chExt cx="0" cy="0"/>
-        </a:xfrm>
-      </p:grpSpPr>
-      <p:sp>
-        <p:nvSpPr>
-          <p:cNvPr id="40" name="Title 39">
-            <a:extLst>
-              <a:ext uri="{FF2B5EF4-FFF2-40B4-BE49-F238E27FC236}">
-                <a16:creationId xmlns:a16="http://schemas.microsoft.com/office/drawing/2014/main" id="{90A4F5DC-8583-CECB-9FAE-14C60A2871A8}"/>
-              </a:ext>
-            </a:extLst>
-          </p:cNvPr>
-          <p:cNvSpPr>
-            <a:spLocks noGrp="1"/>
-          </p:cNvSpPr>
-          <p:nvPr>
-            <p:ph type="title"/>
-          </p:nvPr>
-        </p:nvSpPr>
-        <p:spPr>
-          <a:xfrm>
-            <a:off x="660400" y="805213"/>
-            <a:ext cx="8620078" cy="830997"/>
-          </a:xfrm>
-        </p:spPr>
-        <p:txBody>
-          <a:bodyPr/>
-          <a:lstStyle/>
-          <a:p>
-            <a:r>
-              <a:rPr lang="en-US" dirty="0"/>
-              <a:t>Tools Commonly Used for Pager Rotation</a:t>
-            </a:r>
-            <a:br>
-              <a:rPr lang="en-US" dirty="0"/>
-            </a:br>
-            <a:endParaRPr lang="en-US" dirty="0"/>
-          </a:p>
-        </p:txBody>
-      </p:sp>
-      <p:pic>
-        <p:nvPicPr>
-          <p:cNvPr id="42" name="Picture Placeholder 3" descr="close up of building">
-            <a:extLst>
-              <a:ext uri="{FF2B5EF4-FFF2-40B4-BE49-F238E27FC236}">
-                <a16:creationId xmlns:a16="http://schemas.microsoft.com/office/drawing/2014/main" id="{DAE03B87-032A-525F-149F-7D6A834B947A}"/>
-              </a:ext>
-            </a:extLst>
-          </p:cNvPr>
-          <p:cNvPicPr>
-            <a:picLocks noGrp="1" noChangeAspect="1"/>
-          </p:cNvPicPr>
-          <p:nvPr>
-            <p:ph type="pic" sz="quarter" idx="20"/>
-          </p:nvPr>
-        </p:nvPicPr>
-        <p:blipFill>
-          <a:blip r:embed="rId2"/>
-          <a:srcRect t="13712" b="13712"/>
-          <a:stretch>
-            <a:fillRect/>
-          </a:stretch>
-        </p:blipFill>
-        <p:spPr>
-          <a:xfrm>
-            <a:off x="9393238" y="0"/>
-            <a:ext cx="2798762" cy="1354138"/>
-          </a:xfrm>
-          <a:custGeom>
-            <a:avLst/>
-            <a:gdLst>
-              <a:gd name="connsiteX0" fmla="*/ 316595 w 2798762"/>
-              <a:gd name="connsiteY0" fmla="*/ 369378 h 1635849"/>
-              <a:gd name="connsiteX1" fmla="*/ 1152465 w 2798762"/>
-              <a:gd name="connsiteY1" fmla="*/ 369378 h 1635849"/>
-              <a:gd name="connsiteX2" fmla="*/ 1469083 w 2798762"/>
-              <a:gd name="connsiteY2" fmla="*/ 1002614 h 1635849"/>
-              <a:gd name="connsiteX3" fmla="*/ 1152465 w 2798762"/>
-              <a:gd name="connsiteY3" fmla="*/ 1635849 h 1635849"/>
-              <a:gd name="connsiteX4" fmla="*/ 316595 w 2798762"/>
-              <a:gd name="connsiteY4" fmla="*/ 1635849 h 1635849"/>
-              <a:gd name="connsiteX5" fmla="*/ 0 w 2798762"/>
-              <a:gd name="connsiteY5" fmla="*/ 1002660 h 1635849"/>
-              <a:gd name="connsiteX6" fmla="*/ 0 w 2798762"/>
-              <a:gd name="connsiteY6" fmla="*/ 1002568 h 1635849"/>
-              <a:gd name="connsiteX7" fmla="*/ 1193125 w 2798762"/>
-              <a:gd name="connsiteY7" fmla="*/ 0 h 1635849"/>
-              <a:gd name="connsiteX8" fmla="*/ 2798762 w 2798762"/>
-              <a:gd name="connsiteY8" fmla="*/ 0 h 1635849"/>
-              <a:gd name="connsiteX9" fmla="*/ 2798762 w 2798762"/>
-              <a:gd name="connsiteY9" fmla="*/ 786966 h 1635849"/>
-              <a:gd name="connsiteX10" fmla="*/ 2719777 w 2798762"/>
-              <a:gd name="connsiteY10" fmla="*/ 944936 h 1635849"/>
-              <a:gd name="connsiteX11" fmla="*/ 1582346 w 2798762"/>
-              <a:gd name="connsiteY11" fmla="*/ 944936 h 1635849"/>
-              <a:gd name="connsiteX12" fmla="*/ 1151501 w 2798762"/>
-              <a:gd name="connsiteY12" fmla="*/ 83246 h 1635849"/>
-            </a:gdLst>
-            <a:ahLst/>
-            <a:cxnLst>
-              <a:cxn ang="0">
-                <a:pos x="connsiteX0" y="connsiteY0"/>
-              </a:cxn>
-              <a:cxn ang="0">
-                <a:pos x="connsiteX1" y="connsiteY1"/>
-              </a:cxn>
-              <a:cxn ang="0">
-                <a:pos x="connsiteX2" y="connsiteY2"/>
-              </a:cxn>
-              <a:cxn ang="0">
-                <a:pos x="connsiteX3" y="connsiteY3"/>
-              </a:cxn>
-              <a:cxn ang="0">
-                <a:pos x="connsiteX4" y="connsiteY4"/>
-              </a:cxn>
-              <a:cxn ang="0">
-                <a:pos x="connsiteX5" y="connsiteY5"/>
-              </a:cxn>
-              <a:cxn ang="0">
-                <a:pos x="connsiteX6" y="connsiteY6"/>
-              </a:cxn>
-              <a:cxn ang="0">
-                <a:pos x="connsiteX7" y="connsiteY7"/>
-              </a:cxn>
-              <a:cxn ang="0">
-                <a:pos x="connsiteX8" y="connsiteY8"/>
-              </a:cxn>
-              <a:cxn ang="0">
-                <a:pos x="connsiteX9" y="connsiteY9"/>
-              </a:cxn>
-              <a:cxn ang="0">
-                <a:pos x="connsiteX10" y="connsiteY10"/>
-              </a:cxn>
-              <a:cxn ang="0">
-                <a:pos x="connsiteX11" y="connsiteY11"/>
-              </a:cxn>
-              <a:cxn ang="0">
-                <a:pos x="connsiteX12" y="connsiteY12"/>
-              </a:cxn>
-            </a:cxnLst>
-            <a:rect l="l" t="t" r="r" b="b"/>
-            <a:pathLst>
-              <a:path w="2798762" h="1635849">
-                <a:moveTo>
-                  <a:pt x="316595" y="369378"/>
-                </a:moveTo>
-                <a:lnTo>
-                  <a:pt x="1152465" y="369378"/>
-                </a:lnTo>
-                <a:lnTo>
-                  <a:pt x="1469083" y="1002614"/>
-                </a:lnTo>
-                <a:lnTo>
-                  <a:pt x="1152465" y="1635849"/>
-                </a:lnTo>
-                <a:lnTo>
-                  <a:pt x="316595" y="1635849"/>
-                </a:lnTo>
-                <a:lnTo>
-                  <a:pt x="0" y="1002660"/>
-                </a:lnTo>
-                <a:lnTo>
-                  <a:pt x="0" y="1002568"/>
-                </a:lnTo>
-                <a:close/>
-                <a:moveTo>
-                  <a:pt x="1193125" y="0"/>
-                </a:moveTo>
-                <a:lnTo>
-                  <a:pt x="2798762" y="0"/>
-                </a:lnTo>
-                <a:lnTo>
-                  <a:pt x="2798762" y="786966"/>
-                </a:lnTo>
-                <a:lnTo>
-                  <a:pt x="2719777" y="944936"/>
-                </a:lnTo>
-                <a:lnTo>
-                  <a:pt x="1582346" y="944936"/>
-                </a:lnTo>
-                <a:lnTo>
-                  <a:pt x="1151501" y="83246"/>
-                </a:lnTo>
-                <a:close/>
-              </a:path>
-            </a:pathLst>
-          </a:custGeom>
-        </p:spPr>
-      </p:pic>
-      <p:sp>
-        <p:nvSpPr>
-          <p:cNvPr id="5" name="Text Placeholder 4">
-            <a:extLst>
-              <a:ext uri="{FF2B5EF4-FFF2-40B4-BE49-F238E27FC236}">
                 <a16:creationId xmlns:a16="http://schemas.microsoft.com/office/drawing/2014/main" id="{9EE43BE7-B0BB-8835-93D9-E5E85F18AFD0}"/>
               </a:ext>
             </a:extLst>
@@ -9215,7 +8946,7 @@
 </p:sld>
 </file>
 
-<file path=ppt/slides/slide12.xml><?xml version="1.0" encoding="utf-8"?>
+<file path=ppt/slides/slide11.xml><?xml version="1.0" encoding="utf-8"?>
 <p:sld xmlns:a="http://schemas.openxmlformats.org/drawingml/2006/main" xmlns:r="http://schemas.openxmlformats.org/officeDocument/2006/relationships" xmlns:p="http://schemas.openxmlformats.org/presentationml/2006/main">
   <p:cSld>
     <p:bg>
@@ -9331,7 +9062,7 @@
         </p:blipFill>
         <p:spPr>
           <a:xfrm>
-            <a:off x="230494" y="2013322"/>
+            <a:off x="402608" y="1529538"/>
             <a:ext cx="9437426" cy="3036071"/>
           </a:xfrm>
           <a:prstGeom prst="rect">
@@ -9352,7 +9083,7 @@
 </p:sld>
 </file>
 
-<file path=ppt/slides/slide13.xml><?xml version="1.0" encoding="utf-8"?>
+<file path=ppt/slides/slide12.xml><?xml version="1.0" encoding="utf-8"?>
 <p:sld xmlns:a="http://schemas.openxmlformats.org/drawingml/2006/main" xmlns:r="http://schemas.openxmlformats.org/officeDocument/2006/relationships" xmlns:p="http://schemas.openxmlformats.org/presentationml/2006/main">
   <p:cSld>
     <p:spTree>
@@ -9605,7 +9336,12 @@
             <p:ph type="body" sz="quarter" idx="12"/>
           </p:nvPr>
         </p:nvSpPr>
-        <p:spPr/>
+        <p:spPr>
+          <a:xfrm>
+            <a:off x="660400" y="2044700"/>
+            <a:ext cx="5071660" cy="3560763"/>
+          </a:xfrm>
+        </p:spPr>
         <p:txBody>
           <a:bodyPr/>
           <a:lstStyle/>
@@ -9641,6 +9377,18 @@
             <a:r>
               <a:rPr lang="en-US" dirty="0"/>
               <a:t>It fosters collaboration between development and operations, promoting shared accountability.</a:t>
+            </a:r>
+          </a:p>
+          <a:p>
+            <a:pPr marL="0" indent="0">
+              <a:buNone/>
+            </a:pPr>
+            <a:br>
+              <a:rPr lang="en-US" dirty="0"/>
+            </a:br>
+            <a:r>
+              <a:rPr lang="en-US" dirty="0"/>
+              <a:t>https://youtu.be/hZutwakbxcA</a:t>
             </a:r>
           </a:p>
         </p:txBody>
